--- a/ppt/IndusAI08-DeepLearning.pptx
+++ b/ppt/IndusAI08-DeepLearning.pptx
@@ -5,10 +5,10 @@
     <p:sldMasterId id="2147483653" r:id="rId1"/>
   </p:sldMasterIdLst>
   <p:notesMasterIdLst>
-    <p:notesMasterId r:id="rId45"/>
+    <p:notesMasterId r:id="rId46"/>
   </p:notesMasterIdLst>
   <p:handoutMasterIdLst>
-    <p:handoutMasterId r:id="rId46"/>
+    <p:handoutMasterId r:id="rId47"/>
   </p:handoutMasterIdLst>
   <p:sldIdLst>
     <p:sldId id="264" r:id="rId2"/>
@@ -39,21 +39,22 @@
     <p:sldId id="326" r:id="rId27"/>
     <p:sldId id="322" r:id="rId28"/>
     <p:sldId id="318" r:id="rId29"/>
-    <p:sldId id="331" r:id="rId30"/>
-    <p:sldId id="333" r:id="rId31"/>
-    <p:sldId id="271" r:id="rId32"/>
-    <p:sldId id="338" r:id="rId33"/>
-    <p:sldId id="298" r:id="rId34"/>
-    <p:sldId id="332" r:id="rId35"/>
-    <p:sldId id="359" r:id="rId36"/>
-    <p:sldId id="360" r:id="rId37"/>
-    <p:sldId id="361" r:id="rId38"/>
-    <p:sldId id="303" r:id="rId39"/>
-    <p:sldId id="304" r:id="rId40"/>
-    <p:sldId id="362" r:id="rId41"/>
-    <p:sldId id="350" r:id="rId42"/>
-    <p:sldId id="351" r:id="rId43"/>
-    <p:sldId id="352" r:id="rId44"/>
+    <p:sldId id="364" r:id="rId30"/>
+    <p:sldId id="331" r:id="rId31"/>
+    <p:sldId id="333" r:id="rId32"/>
+    <p:sldId id="271" r:id="rId33"/>
+    <p:sldId id="338" r:id="rId34"/>
+    <p:sldId id="298" r:id="rId35"/>
+    <p:sldId id="332" r:id="rId36"/>
+    <p:sldId id="359" r:id="rId37"/>
+    <p:sldId id="360" r:id="rId38"/>
+    <p:sldId id="361" r:id="rId39"/>
+    <p:sldId id="303" r:id="rId40"/>
+    <p:sldId id="304" r:id="rId41"/>
+    <p:sldId id="362" r:id="rId42"/>
+    <p:sldId id="350" r:id="rId43"/>
+    <p:sldId id="351" r:id="rId44"/>
+    <p:sldId id="352" r:id="rId45"/>
   </p:sldIdLst>
   <p:sldSz cx="9144000" cy="6858000" type="screen4x3"/>
   <p:notesSz cx="6648450" cy="9782175"/>
@@ -3839,6 +3840,14 @@
               <a:rPr lang="fr-FR" altLang="fr-FR" dirty="0" err="1"/>
               <a:t>TensorFlow</a:t>
             </a:r>
+            <a:r>
+              <a:rPr lang="fr-FR" altLang="fr-FR" dirty="0"/>
+              <a:t> &amp; </a:t>
+            </a:r>
+            <a:r>
+              <a:rPr lang="fr-FR" altLang="fr-FR" dirty="0" err="1"/>
+              <a:t>PyTorch</a:t>
+            </a:r>
             <a:endParaRPr lang="fr-FR" altLang="fr-FR" dirty="0"/>
           </a:p>
         </p:txBody>
@@ -7955,6 +7964,231 @@
       </p:grpSpPr>
       <p:sp>
         <p:nvSpPr>
+          <p:cNvPr id="2" name="Titre 1">
+            <a:extLst>
+              <a:ext uri="{FF2B5EF4-FFF2-40B4-BE49-F238E27FC236}">
+                <a16:creationId xmlns:a16="http://schemas.microsoft.com/office/drawing/2014/main" id="{F6D3CCEF-BCFC-982E-25D8-AF1C09F07D6E}"/>
+              </a:ext>
+            </a:extLst>
+          </p:cNvPr>
+          <p:cNvSpPr>
+            <a:spLocks noGrp="1"/>
+          </p:cNvSpPr>
+          <p:nvPr>
+            <p:ph type="title"/>
+          </p:nvPr>
+        </p:nvSpPr>
+        <p:spPr/>
+        <p:txBody>
+          <a:bodyPr/>
+          <a:lstStyle/>
+          <a:p>
+            <a:endParaRPr lang="fr-FR" dirty="0"/>
+          </a:p>
+        </p:txBody>
+      </p:sp>
+      <p:sp>
+        <p:nvSpPr>
+          <p:cNvPr id="3" name="Espace réservé du contenu 2">
+            <a:extLst>
+              <a:ext uri="{FF2B5EF4-FFF2-40B4-BE49-F238E27FC236}">
+                <a16:creationId xmlns:a16="http://schemas.microsoft.com/office/drawing/2014/main" id="{43D97679-7B5D-194E-C95A-ABB9D72528F0}"/>
+              </a:ext>
+            </a:extLst>
+          </p:cNvPr>
+          <p:cNvSpPr>
+            <a:spLocks noGrp="1"/>
+          </p:cNvSpPr>
+          <p:nvPr>
+            <p:ph idx="1"/>
+          </p:nvPr>
+        </p:nvSpPr>
+        <p:spPr/>
+        <p:txBody>
+          <a:bodyPr/>
+          <a:lstStyle/>
+          <a:p>
+            <a:r>
+              <a:rPr lang="fr-FR" dirty="0"/>
+              <a:t>2 000 neurones</a:t>
+            </a:r>
+          </a:p>
+          <a:p>
+            <a:r>
+              <a:rPr lang="fr-FR" dirty="0"/>
+              <a:t>1000 x 1000 = 1 000 000 poids</a:t>
+            </a:r>
+          </a:p>
+          <a:p>
+            <a:r>
+              <a:rPr lang="fr-FR" dirty="0"/>
+              <a:t>20 </a:t>
+            </a:r>
+            <a:r>
+              <a:rPr lang="fr-FR" dirty="0" err="1"/>
+              <a:t>layers</a:t>
+            </a:r>
+            <a:r>
+              <a:rPr lang="fr-FR" dirty="0"/>
+              <a:t> de 100 neurones = 100x100*20 = 200 000</a:t>
+            </a:r>
+          </a:p>
+          <a:p>
+            <a:endParaRPr lang="fr-FR" dirty="0"/>
+          </a:p>
+          <a:p>
+            <a:endParaRPr lang="fr-FR" dirty="0"/>
+          </a:p>
+        </p:txBody>
+      </p:sp>
+    </p:spTree>
+    <p:extLst>
+      <p:ext uri="{BB962C8B-B14F-4D97-AF65-F5344CB8AC3E}">
+        <p14:creationId xmlns:p14="http://schemas.microsoft.com/office/powerpoint/2010/main" val="1089919024"/>
+      </p:ext>
+    </p:extLst>
+  </p:cSld>
+  <p:clrMapOvr>
+    <a:masterClrMapping/>
+  </p:clrMapOvr>
+</p:sld>
+</file>
+
+<file path=ppt/slides/slide3.xml><?xml version="1.0" encoding="utf-8"?>
+<p:sld xmlns:a="http://schemas.openxmlformats.org/drawingml/2006/main" xmlns:r="http://schemas.openxmlformats.org/officeDocument/2006/relationships" xmlns:p="http://schemas.openxmlformats.org/presentationml/2006/main">
+  <p:cSld>
+    <p:spTree>
+      <p:nvGrpSpPr>
+        <p:cNvPr id="1" name=""/>
+        <p:cNvGrpSpPr/>
+        <p:nvPr/>
+      </p:nvGrpSpPr>
+      <p:grpSpPr>
+        <a:xfrm>
+          <a:off x="0" y="0"/>
+          <a:ext cx="0" cy="0"/>
+          <a:chOff x="0" y="0"/>
+          <a:chExt cx="0" cy="0"/>
+        </a:xfrm>
+      </p:grpSpPr>
+      <p:sp>
+        <p:nvSpPr>
+          <p:cNvPr id="2" name="Titre 1">
+            <a:extLst>
+              <a:ext uri="{FF2B5EF4-FFF2-40B4-BE49-F238E27FC236}">
+                <a16:creationId xmlns:a16="http://schemas.microsoft.com/office/drawing/2014/main" id="{10623EF0-3F89-B93C-B4F5-DD64F4B5A4AD}"/>
+              </a:ext>
+            </a:extLst>
+          </p:cNvPr>
+          <p:cNvSpPr>
+            <a:spLocks noGrp="1"/>
+          </p:cNvSpPr>
+          <p:nvPr>
+            <p:ph type="title"/>
+          </p:nvPr>
+        </p:nvSpPr>
+        <p:spPr/>
+        <p:txBody>
+          <a:bodyPr/>
+          <a:lstStyle/>
+          <a:p>
+            <a:r>
+              <a:rPr lang="fr-FR" dirty="0" err="1"/>
+              <a:t>Frameworks</a:t>
+            </a:r>
+            <a:endParaRPr lang="fr-FR" dirty="0"/>
+          </a:p>
+        </p:txBody>
+      </p:sp>
+      <p:sp>
+        <p:nvSpPr>
+          <p:cNvPr id="3" name="Espace réservé du contenu 2">
+            <a:extLst>
+              <a:ext uri="{FF2B5EF4-FFF2-40B4-BE49-F238E27FC236}">
+                <a16:creationId xmlns:a16="http://schemas.microsoft.com/office/drawing/2014/main" id="{99306F81-32CB-7C16-D1AA-89B50707E332}"/>
+              </a:ext>
+            </a:extLst>
+          </p:cNvPr>
+          <p:cNvSpPr>
+            <a:spLocks noGrp="1"/>
+          </p:cNvSpPr>
+          <p:nvPr>
+            <p:ph idx="1"/>
+          </p:nvPr>
+        </p:nvSpPr>
+        <p:spPr/>
+        <p:txBody>
+          <a:bodyPr/>
+          <a:lstStyle/>
+          <a:p>
+            <a:r>
+              <a:rPr lang="fr-FR" dirty="0"/>
+              <a:t>Facebook </a:t>
+            </a:r>
+            <a:r>
+              <a:rPr lang="fr-FR" dirty="0" err="1"/>
+              <a:t>PyTorch</a:t>
+            </a:r>
+            <a:endParaRPr lang="fr-FR" dirty="0"/>
+          </a:p>
+          <a:p>
+            <a:r>
+              <a:rPr lang="fr-FR" dirty="0"/>
+              <a:t>Azure ML</a:t>
+            </a:r>
+          </a:p>
+          <a:p>
+            <a:r>
+              <a:rPr lang="fr-FR" dirty="0"/>
+              <a:t>Google </a:t>
+            </a:r>
+            <a:r>
+              <a:rPr lang="fr-FR" dirty="0" err="1"/>
+              <a:t>Tensorflow</a:t>
+            </a:r>
+            <a:endParaRPr lang="fr-FR" dirty="0"/>
+          </a:p>
+          <a:p>
+            <a:r>
+              <a:rPr lang="fr-FR"/>
+              <a:t>SparkML</a:t>
+            </a:r>
+            <a:endParaRPr lang="fr-FR" dirty="0"/>
+          </a:p>
+        </p:txBody>
+      </p:sp>
+    </p:spTree>
+    <p:extLst>
+      <p:ext uri="{BB962C8B-B14F-4D97-AF65-F5344CB8AC3E}">
+        <p14:creationId xmlns:p14="http://schemas.microsoft.com/office/powerpoint/2010/main" val="1437760631"/>
+      </p:ext>
+    </p:extLst>
+  </p:cSld>
+  <p:clrMapOvr>
+    <a:masterClrMapping/>
+  </p:clrMapOvr>
+</p:sld>
+</file>
+
+<file path=ppt/slides/slide30.xml><?xml version="1.0" encoding="utf-8"?>
+<p:sld xmlns:a="http://schemas.openxmlformats.org/drawingml/2006/main" xmlns:r="http://schemas.openxmlformats.org/officeDocument/2006/relationships" xmlns:p="http://schemas.openxmlformats.org/presentationml/2006/main">
+  <p:cSld>
+    <p:spTree>
+      <p:nvGrpSpPr>
+        <p:cNvPr id="1" name=""/>
+        <p:cNvGrpSpPr/>
+        <p:nvPr/>
+      </p:nvGrpSpPr>
+      <p:grpSpPr>
+        <a:xfrm>
+          <a:off x="0" y="0"/>
+          <a:ext cx="0" cy="0"/>
+          <a:chOff x="0" y="0"/>
+          <a:chExt cx="0" cy="0"/>
+        </a:xfrm>
+      </p:grpSpPr>
+      <p:sp>
+        <p:nvSpPr>
           <p:cNvPr id="2" name="Titre 1"/>
           <p:cNvSpPr>
             <a:spLocks noGrp="1"/>
@@ -8070,7 +8304,7 @@
 </p:sld>
 </file>
 
-<file path=ppt/slides/slide3.xml><?xml version="1.0" encoding="utf-8"?>
+<file path=ppt/slides/slide31.xml><?xml version="1.0" encoding="utf-8"?>
 <p:sld xmlns:a="http://schemas.openxmlformats.org/drawingml/2006/main" xmlns:r="http://schemas.openxmlformats.org/officeDocument/2006/relationships" xmlns:p="http://schemas.openxmlformats.org/presentationml/2006/main">
   <p:cSld>
     <p:spTree>
@@ -8089,122 +8323,6 @@
       </p:grpSpPr>
       <p:sp>
         <p:nvSpPr>
-          <p:cNvPr id="2" name="Titre 1">
-            <a:extLst>
-              <a:ext uri="{FF2B5EF4-FFF2-40B4-BE49-F238E27FC236}">
-                <a16:creationId xmlns:a16="http://schemas.microsoft.com/office/drawing/2014/main" id="{10623EF0-3F89-B93C-B4F5-DD64F4B5A4AD}"/>
-              </a:ext>
-            </a:extLst>
-          </p:cNvPr>
-          <p:cNvSpPr>
-            <a:spLocks noGrp="1"/>
-          </p:cNvSpPr>
-          <p:nvPr>
-            <p:ph type="title"/>
-          </p:nvPr>
-        </p:nvSpPr>
-        <p:spPr/>
-        <p:txBody>
-          <a:bodyPr/>
-          <a:lstStyle/>
-          <a:p>
-            <a:r>
-              <a:rPr lang="fr-FR" dirty="0" err="1"/>
-              <a:t>Frameworks</a:t>
-            </a:r>
-            <a:endParaRPr lang="fr-FR" dirty="0"/>
-          </a:p>
-        </p:txBody>
-      </p:sp>
-      <p:sp>
-        <p:nvSpPr>
-          <p:cNvPr id="3" name="Espace réservé du contenu 2">
-            <a:extLst>
-              <a:ext uri="{FF2B5EF4-FFF2-40B4-BE49-F238E27FC236}">
-                <a16:creationId xmlns:a16="http://schemas.microsoft.com/office/drawing/2014/main" id="{99306F81-32CB-7C16-D1AA-89B50707E332}"/>
-              </a:ext>
-            </a:extLst>
-          </p:cNvPr>
-          <p:cNvSpPr>
-            <a:spLocks noGrp="1"/>
-          </p:cNvSpPr>
-          <p:nvPr>
-            <p:ph idx="1"/>
-          </p:nvPr>
-        </p:nvSpPr>
-        <p:spPr/>
-        <p:txBody>
-          <a:bodyPr/>
-          <a:lstStyle/>
-          <a:p>
-            <a:r>
-              <a:rPr lang="fr-FR" dirty="0"/>
-              <a:t>Facebook </a:t>
-            </a:r>
-            <a:r>
-              <a:rPr lang="fr-FR" dirty="0" err="1"/>
-              <a:t>PyTorch</a:t>
-            </a:r>
-            <a:endParaRPr lang="fr-FR" dirty="0"/>
-          </a:p>
-          <a:p>
-            <a:r>
-              <a:rPr lang="fr-FR" dirty="0"/>
-              <a:t>Azure ML</a:t>
-            </a:r>
-          </a:p>
-          <a:p>
-            <a:r>
-              <a:rPr lang="fr-FR" dirty="0"/>
-              <a:t>Google </a:t>
-            </a:r>
-            <a:r>
-              <a:rPr lang="fr-FR" dirty="0" err="1"/>
-              <a:t>Tensorflow</a:t>
-            </a:r>
-            <a:endParaRPr lang="fr-FR" dirty="0"/>
-          </a:p>
-          <a:p>
-            <a:r>
-              <a:rPr lang="fr-FR"/>
-              <a:t>SparkML</a:t>
-            </a:r>
-            <a:endParaRPr lang="fr-FR" dirty="0"/>
-          </a:p>
-        </p:txBody>
-      </p:sp>
-    </p:spTree>
-    <p:extLst>
-      <p:ext uri="{BB962C8B-B14F-4D97-AF65-F5344CB8AC3E}">
-        <p14:creationId xmlns:p14="http://schemas.microsoft.com/office/powerpoint/2010/main" val="1437760631"/>
-      </p:ext>
-    </p:extLst>
-  </p:cSld>
-  <p:clrMapOvr>
-    <a:masterClrMapping/>
-  </p:clrMapOvr>
-</p:sld>
-</file>
-
-<file path=ppt/slides/slide30.xml><?xml version="1.0" encoding="utf-8"?>
-<p:sld xmlns:a="http://schemas.openxmlformats.org/drawingml/2006/main" xmlns:r="http://schemas.openxmlformats.org/officeDocument/2006/relationships" xmlns:p="http://schemas.openxmlformats.org/presentationml/2006/main">
-  <p:cSld>
-    <p:spTree>
-      <p:nvGrpSpPr>
-        <p:cNvPr id="1" name=""/>
-        <p:cNvGrpSpPr/>
-        <p:nvPr/>
-      </p:nvGrpSpPr>
-      <p:grpSpPr>
-        <a:xfrm>
-          <a:off x="0" y="0"/>
-          <a:ext cx="0" cy="0"/>
-          <a:chOff x="0" y="0"/>
-          <a:chExt cx="0" cy="0"/>
-        </a:xfrm>
-      </p:grpSpPr>
-      <p:sp>
-        <p:nvSpPr>
           <p:cNvPr id="2" name="Titre 1"/>
           <p:cNvSpPr>
             <a:spLocks noGrp="1"/>
@@ -8286,7 +8404,7 @@
 </p:sld>
 </file>
 
-<file path=ppt/slides/slide31.xml><?xml version="1.0" encoding="utf-8"?>
+<file path=ppt/slides/slide32.xml><?xml version="1.0" encoding="utf-8"?>
 <p:sld xmlns:a="http://schemas.openxmlformats.org/drawingml/2006/main" xmlns:r="http://schemas.openxmlformats.org/officeDocument/2006/relationships" xmlns:p="http://schemas.openxmlformats.org/presentationml/2006/main">
   <p:cSld>
     <p:spTree>
@@ -8555,7 +8673,7 @@
 </p:sld>
 </file>
 
-<file path=ppt/slides/slide32.xml><?xml version="1.0" encoding="utf-8"?>
+<file path=ppt/slides/slide33.xml><?xml version="1.0" encoding="utf-8"?>
 <p:sld xmlns:a="http://schemas.openxmlformats.org/drawingml/2006/main" xmlns:r="http://schemas.openxmlformats.org/officeDocument/2006/relationships" xmlns:p="http://schemas.openxmlformats.org/presentationml/2006/main">
   <p:cSld>
     <p:spTree>
@@ -8668,7 +8786,7 @@
 </p:sld>
 </file>
 
-<file path=ppt/slides/slide33.xml><?xml version="1.0" encoding="utf-8"?>
+<file path=ppt/slides/slide34.xml><?xml version="1.0" encoding="utf-8"?>
 <p:sld xmlns:a="http://schemas.openxmlformats.org/drawingml/2006/main" xmlns:r="http://schemas.openxmlformats.org/officeDocument/2006/relationships" xmlns:p="http://schemas.openxmlformats.org/presentationml/2006/main">
   <p:cSld>
     <p:spTree>
@@ -8769,7 +8887,7 @@
 </p:sld>
 </file>
 
-<file path=ppt/slides/slide34.xml><?xml version="1.0" encoding="utf-8"?>
+<file path=ppt/slides/slide35.xml><?xml version="1.0" encoding="utf-8"?>
 <p:sld xmlns:a="http://schemas.openxmlformats.org/drawingml/2006/main" xmlns:r="http://schemas.openxmlformats.org/officeDocument/2006/relationships" xmlns:p="http://schemas.openxmlformats.org/presentationml/2006/main">
   <p:cSld>
     <p:spTree>
@@ -8940,7 +9058,7 @@
 </p:sld>
 </file>
 
-<file path=ppt/slides/slide35.xml><?xml version="1.0" encoding="utf-8"?>
+<file path=ppt/slides/slide36.xml><?xml version="1.0" encoding="utf-8"?>
 <p:sld xmlns:a="http://schemas.openxmlformats.org/drawingml/2006/main" xmlns:r="http://schemas.openxmlformats.org/officeDocument/2006/relationships" xmlns:p="http://schemas.openxmlformats.org/presentationml/2006/main">
   <p:cSld>
     <p:spTree>
@@ -9034,7 +9152,7 @@
 </p:sld>
 </file>
 
-<file path=ppt/slides/slide36.xml><?xml version="1.0" encoding="utf-8"?>
+<file path=ppt/slides/slide37.xml><?xml version="1.0" encoding="utf-8"?>
 <p:sld xmlns:a="http://schemas.openxmlformats.org/drawingml/2006/main" xmlns:r="http://schemas.openxmlformats.org/officeDocument/2006/relationships" xmlns:p="http://schemas.openxmlformats.org/presentationml/2006/main">
   <p:cSld>
     <p:spTree>
@@ -9210,7 +9328,7 @@
 </p:sld>
 </file>
 
-<file path=ppt/slides/slide37.xml><?xml version="1.0" encoding="utf-8"?>
+<file path=ppt/slides/slide38.xml><?xml version="1.0" encoding="utf-8"?>
 <p:sld xmlns:a="http://schemas.openxmlformats.org/drawingml/2006/main" xmlns:r="http://schemas.openxmlformats.org/officeDocument/2006/relationships" xmlns:p="http://schemas.openxmlformats.org/presentationml/2006/main">
   <p:cSld>
     <p:spTree>
@@ -9318,7 +9436,7 @@
 </p:sld>
 </file>
 
-<file path=ppt/slides/slide38.xml><?xml version="1.0" encoding="utf-8"?>
+<file path=ppt/slides/slide39.xml><?xml version="1.0" encoding="utf-8"?>
 <p:sld xmlns:a="http://schemas.openxmlformats.org/drawingml/2006/main" xmlns:r="http://schemas.openxmlformats.org/officeDocument/2006/relationships" xmlns:p="http://schemas.openxmlformats.org/presentationml/2006/main">
   <p:cSld>
     <p:spTree>
@@ -9450,7 +9568,179 @@
 </p:sld>
 </file>
 
-<file path=ppt/slides/slide39.xml><?xml version="1.0" encoding="utf-8"?>
+<file path=ppt/slides/slide4.xml><?xml version="1.0" encoding="utf-8"?>
+<p:sld xmlns:a="http://schemas.openxmlformats.org/drawingml/2006/main" xmlns:r="http://schemas.openxmlformats.org/officeDocument/2006/relationships" xmlns:p="http://schemas.openxmlformats.org/presentationml/2006/main">
+  <p:cSld>
+    <p:spTree>
+      <p:nvGrpSpPr>
+        <p:cNvPr id="1" name=""/>
+        <p:cNvGrpSpPr/>
+        <p:nvPr/>
+      </p:nvGrpSpPr>
+      <p:grpSpPr>
+        <a:xfrm>
+          <a:off x="0" y="0"/>
+          <a:ext cx="0" cy="0"/>
+          <a:chOff x="0" y="0"/>
+          <a:chExt cx="0" cy="0"/>
+        </a:xfrm>
+      </p:grpSpPr>
+      <p:sp>
+        <p:nvSpPr>
+          <p:cNvPr id="2" name="Titre 1"/>
+          <p:cNvSpPr>
+            <a:spLocks noGrp="1"/>
+          </p:cNvSpPr>
+          <p:nvPr>
+            <p:ph type="title"/>
+          </p:nvPr>
+        </p:nvSpPr>
+        <p:spPr/>
+        <p:txBody>
+          <a:bodyPr/>
+          <a:lstStyle/>
+          <a:p>
+            <a:r>
+              <a:rPr lang="fr-FR" dirty="0"/>
+              <a:t>CPU, GPU, TPU</a:t>
+            </a:r>
+          </a:p>
+        </p:txBody>
+      </p:sp>
+      <p:sp>
+        <p:nvSpPr>
+          <p:cNvPr id="3" name="Espace réservé du contenu 2"/>
+          <p:cNvSpPr>
+            <a:spLocks noGrp="1"/>
+          </p:cNvSpPr>
+          <p:nvPr>
+            <p:ph idx="1"/>
+          </p:nvPr>
+        </p:nvSpPr>
+        <p:spPr/>
+        <p:txBody>
+          <a:bodyPr/>
+          <a:lstStyle/>
+          <a:p>
+            <a:r>
+              <a:rPr lang="fr-FR" dirty="0" err="1"/>
+              <a:t>TensorFlow</a:t>
+            </a:r>
+            <a:r>
+              <a:rPr lang="fr-FR" dirty="0"/>
+              <a:t> est multiple CPU</a:t>
+            </a:r>
+          </a:p>
+          <a:p>
+            <a:r>
+              <a:rPr lang="fr-FR" dirty="0" err="1"/>
+              <a:t>TensorFlow</a:t>
+            </a:r>
+            <a:r>
+              <a:rPr lang="fr-FR" dirty="0"/>
+              <a:t> est GPU</a:t>
+            </a:r>
+          </a:p>
+          <a:p>
+            <a:pPr lvl="1"/>
+            <a:r>
+              <a:rPr lang="fr-FR" dirty="0"/>
+              <a:t>Raison du Succès</a:t>
+            </a:r>
+          </a:p>
+          <a:p>
+            <a:pPr lvl="1"/>
+            <a:r>
+              <a:rPr lang="fr-FR" dirty="0"/>
+              <a:t>Technologies GPGPU et GPPGPU</a:t>
+            </a:r>
+          </a:p>
+          <a:p>
+            <a:r>
+              <a:rPr lang="fr-FR" dirty="0" err="1"/>
+              <a:t>TensorFlow</a:t>
+            </a:r>
+            <a:r>
+              <a:rPr lang="fr-FR" dirty="0"/>
+              <a:t> est TPU</a:t>
+            </a:r>
+          </a:p>
+          <a:p>
+            <a:pPr lvl="1"/>
+            <a:r>
+              <a:rPr lang="fr-FR" dirty="0" err="1"/>
+              <a:t>Tensor</a:t>
+            </a:r>
+            <a:r>
+              <a:rPr lang="fr-FR" dirty="0"/>
+              <a:t> </a:t>
+            </a:r>
+            <a:r>
+              <a:rPr lang="fr-FR" dirty="0" err="1"/>
+              <a:t>Processing</a:t>
+            </a:r>
+            <a:r>
+              <a:rPr lang="fr-FR" dirty="0"/>
+              <a:t> Unit</a:t>
+            </a:r>
+          </a:p>
+          <a:p>
+            <a:pPr lvl="1"/>
+            <a:r>
+              <a:rPr lang="fr-FR" dirty="0"/>
+              <a:t>Uniquement pour le </a:t>
+            </a:r>
+            <a:r>
+              <a:rPr lang="fr-FR" dirty="0" err="1"/>
+              <a:t>deep</a:t>
+            </a:r>
+            <a:r>
+              <a:rPr lang="fr-FR" dirty="0"/>
+              <a:t> </a:t>
+            </a:r>
+            <a:r>
+              <a:rPr lang="fr-FR" dirty="0" err="1"/>
+              <a:t>learning</a:t>
+            </a:r>
+            <a:endParaRPr lang="fr-FR" dirty="0"/>
+          </a:p>
+          <a:p>
+            <a:pPr lvl="1"/>
+            <a:r>
+              <a:rPr lang="fr-FR" dirty="0"/>
+              <a:t>Format propriétaire Google Cloud ML</a:t>
+            </a:r>
+          </a:p>
+          <a:p>
+            <a:r>
+              <a:rPr lang="fr-FR" dirty="0"/>
+              <a:t>CPU, GPU et TPU sont génériques grâce à ABC</a:t>
+            </a:r>
+          </a:p>
+          <a:p>
+            <a:pPr lvl="1"/>
+            <a:endParaRPr lang="fr-FR" dirty="0"/>
+          </a:p>
+          <a:p>
+            <a:pPr lvl="1"/>
+            <a:endParaRPr lang="fr-FR" dirty="0"/>
+          </a:p>
+        </p:txBody>
+      </p:sp>
+    </p:spTree>
+    <p:extLst>
+      <p:ext uri="{BB962C8B-B14F-4D97-AF65-F5344CB8AC3E}">
+        <p14:creationId xmlns:p14="http://schemas.microsoft.com/office/powerpoint/2010/main" val="3524914859"/>
+      </p:ext>
+    </p:extLst>
+  </p:cSld>
+  <p:clrMapOvr>
+    <a:masterClrMapping/>
+  </p:clrMapOvr>
+</p:sld>
+</file>
+
+<file path=ppt/slides/slide40.xml><?xml version="1.0" encoding="utf-8"?>
 <p:sld xmlns:a="http://schemas.openxmlformats.org/drawingml/2006/main" xmlns:r="http://schemas.openxmlformats.org/officeDocument/2006/relationships" xmlns:p="http://schemas.openxmlformats.org/presentationml/2006/main">
   <p:cSld>
     <p:spTree>
@@ -9593,332 +9883,6 @@
 </p:sld>
 </file>
 
-<file path=ppt/slides/slide4.xml><?xml version="1.0" encoding="utf-8"?>
-<p:sld xmlns:a="http://schemas.openxmlformats.org/drawingml/2006/main" xmlns:r="http://schemas.openxmlformats.org/officeDocument/2006/relationships" xmlns:p="http://schemas.openxmlformats.org/presentationml/2006/main">
-  <p:cSld>
-    <p:spTree>
-      <p:nvGrpSpPr>
-        <p:cNvPr id="1" name=""/>
-        <p:cNvGrpSpPr/>
-        <p:nvPr/>
-      </p:nvGrpSpPr>
-      <p:grpSpPr>
-        <a:xfrm>
-          <a:off x="0" y="0"/>
-          <a:ext cx="0" cy="0"/>
-          <a:chOff x="0" y="0"/>
-          <a:chExt cx="0" cy="0"/>
-        </a:xfrm>
-      </p:grpSpPr>
-      <p:sp>
-        <p:nvSpPr>
-          <p:cNvPr id="2" name="Titre 1"/>
-          <p:cNvSpPr>
-            <a:spLocks noGrp="1"/>
-          </p:cNvSpPr>
-          <p:nvPr>
-            <p:ph type="title"/>
-          </p:nvPr>
-        </p:nvSpPr>
-        <p:spPr/>
-        <p:txBody>
-          <a:bodyPr/>
-          <a:lstStyle/>
-          <a:p>
-            <a:r>
-              <a:rPr lang="fr-FR" dirty="0"/>
-              <a:t>CPU, GPU, TPU</a:t>
-            </a:r>
-          </a:p>
-        </p:txBody>
-      </p:sp>
-      <p:sp>
-        <p:nvSpPr>
-          <p:cNvPr id="3" name="Espace réservé du contenu 2"/>
-          <p:cNvSpPr>
-            <a:spLocks noGrp="1"/>
-          </p:cNvSpPr>
-          <p:nvPr>
-            <p:ph idx="1"/>
-          </p:nvPr>
-        </p:nvSpPr>
-        <p:spPr/>
-        <p:txBody>
-          <a:bodyPr/>
-          <a:lstStyle/>
-          <a:p>
-            <a:r>
-              <a:rPr lang="fr-FR" dirty="0" err="1"/>
-              <a:t>TensorFlow</a:t>
-            </a:r>
-            <a:r>
-              <a:rPr lang="fr-FR" dirty="0"/>
-              <a:t> est multiple CPU</a:t>
-            </a:r>
-          </a:p>
-          <a:p>
-            <a:r>
-              <a:rPr lang="fr-FR" dirty="0" err="1"/>
-              <a:t>TensorFlow</a:t>
-            </a:r>
-            <a:r>
-              <a:rPr lang="fr-FR" dirty="0"/>
-              <a:t> est GPU</a:t>
-            </a:r>
-          </a:p>
-          <a:p>
-            <a:pPr lvl="1"/>
-            <a:r>
-              <a:rPr lang="fr-FR" dirty="0"/>
-              <a:t>Raison du Succès</a:t>
-            </a:r>
-          </a:p>
-          <a:p>
-            <a:pPr lvl="1"/>
-            <a:r>
-              <a:rPr lang="fr-FR" dirty="0"/>
-              <a:t>Technologies GPGPU et GPPGPU</a:t>
-            </a:r>
-          </a:p>
-          <a:p>
-            <a:r>
-              <a:rPr lang="fr-FR" dirty="0" err="1"/>
-              <a:t>TensorFlow</a:t>
-            </a:r>
-            <a:r>
-              <a:rPr lang="fr-FR" dirty="0"/>
-              <a:t> est TPU</a:t>
-            </a:r>
-          </a:p>
-          <a:p>
-            <a:pPr lvl="1"/>
-            <a:r>
-              <a:rPr lang="fr-FR" dirty="0" err="1"/>
-              <a:t>Tensor</a:t>
-            </a:r>
-            <a:r>
-              <a:rPr lang="fr-FR" dirty="0"/>
-              <a:t> </a:t>
-            </a:r>
-            <a:r>
-              <a:rPr lang="fr-FR" dirty="0" err="1"/>
-              <a:t>Processing</a:t>
-            </a:r>
-            <a:r>
-              <a:rPr lang="fr-FR" dirty="0"/>
-              <a:t> Unit</a:t>
-            </a:r>
-          </a:p>
-          <a:p>
-            <a:pPr lvl="1"/>
-            <a:r>
-              <a:rPr lang="fr-FR" dirty="0"/>
-              <a:t>Uniquement pour le </a:t>
-            </a:r>
-            <a:r>
-              <a:rPr lang="fr-FR" dirty="0" err="1"/>
-              <a:t>deep</a:t>
-            </a:r>
-            <a:r>
-              <a:rPr lang="fr-FR" dirty="0"/>
-              <a:t> </a:t>
-            </a:r>
-            <a:r>
-              <a:rPr lang="fr-FR" dirty="0" err="1"/>
-              <a:t>learning</a:t>
-            </a:r>
-            <a:endParaRPr lang="fr-FR" dirty="0"/>
-          </a:p>
-          <a:p>
-            <a:pPr lvl="1"/>
-            <a:r>
-              <a:rPr lang="fr-FR" dirty="0"/>
-              <a:t>Format propriétaire Google Cloud ML</a:t>
-            </a:r>
-          </a:p>
-          <a:p>
-            <a:r>
-              <a:rPr lang="fr-FR" dirty="0"/>
-              <a:t>CPU, GPU et TPU sont génériques grâce à ABC</a:t>
-            </a:r>
-          </a:p>
-          <a:p>
-            <a:pPr lvl="1"/>
-            <a:endParaRPr lang="fr-FR" dirty="0"/>
-          </a:p>
-          <a:p>
-            <a:pPr lvl="1"/>
-            <a:endParaRPr lang="fr-FR" dirty="0"/>
-          </a:p>
-        </p:txBody>
-      </p:sp>
-    </p:spTree>
-    <p:extLst>
-      <p:ext uri="{BB962C8B-B14F-4D97-AF65-F5344CB8AC3E}">
-        <p14:creationId xmlns:p14="http://schemas.microsoft.com/office/powerpoint/2010/main" val="3524914859"/>
-      </p:ext>
-    </p:extLst>
-  </p:cSld>
-  <p:clrMapOvr>
-    <a:masterClrMapping/>
-  </p:clrMapOvr>
-</p:sld>
-</file>
-
-<file path=ppt/slides/slide40.xml><?xml version="1.0" encoding="utf-8"?>
-<p:sld xmlns:a="http://schemas.openxmlformats.org/drawingml/2006/main" xmlns:r="http://schemas.openxmlformats.org/officeDocument/2006/relationships" xmlns:p="http://schemas.openxmlformats.org/presentationml/2006/main">
-  <p:cSld>
-    <p:spTree>
-      <p:nvGrpSpPr>
-        <p:cNvPr id="1" name=""/>
-        <p:cNvGrpSpPr/>
-        <p:nvPr/>
-      </p:nvGrpSpPr>
-      <p:grpSpPr>
-        <a:xfrm>
-          <a:off x="0" y="0"/>
-          <a:ext cx="0" cy="0"/>
-          <a:chOff x="0" y="0"/>
-          <a:chExt cx="0" cy="0"/>
-        </a:xfrm>
-      </p:grpSpPr>
-      <p:sp>
-        <p:nvSpPr>
-          <p:cNvPr id="2" name="Titre 1"/>
-          <p:cNvSpPr>
-            <a:spLocks noGrp="1"/>
-          </p:cNvSpPr>
-          <p:nvPr>
-            <p:ph type="title"/>
-          </p:nvPr>
-        </p:nvSpPr>
-        <p:spPr/>
-        <p:txBody>
-          <a:bodyPr/>
-          <a:lstStyle/>
-          <a:p>
-            <a:r>
-              <a:rPr lang="fr-FR" dirty="0"/>
-              <a:t>Vocabulaire</a:t>
-            </a:r>
-          </a:p>
-        </p:txBody>
-      </p:sp>
-      <p:sp>
-        <p:nvSpPr>
-          <p:cNvPr id="3" name="Espace réservé du contenu 2"/>
-          <p:cNvSpPr>
-            <a:spLocks noGrp="1"/>
-          </p:cNvSpPr>
-          <p:nvPr>
-            <p:ph idx="1"/>
-          </p:nvPr>
-        </p:nvSpPr>
-        <p:spPr/>
-        <p:txBody>
-          <a:bodyPr/>
-          <a:lstStyle/>
-          <a:p>
-            <a:r>
-              <a:rPr lang="fr-FR" sz="2400" dirty="0" err="1"/>
-              <a:t>TensorFlow</a:t>
-            </a:r>
-            <a:r>
-              <a:rPr lang="fr-FR" sz="2400" dirty="0"/>
-              <a:t> et </a:t>
-            </a:r>
-            <a:r>
-              <a:rPr lang="fr-FR" sz="2400" dirty="0" err="1"/>
-              <a:t>SKLearn</a:t>
-            </a:r>
-            <a:r>
-              <a:rPr lang="fr-FR" sz="2400" dirty="0"/>
-              <a:t> n’utilisent pas le même vocabulaire</a:t>
-            </a:r>
-          </a:p>
-          <a:p>
-            <a:r>
-              <a:rPr lang="fr-FR" sz="2400" dirty="0" err="1"/>
-              <a:t>TrainingSet</a:t>
-            </a:r>
-            <a:endParaRPr lang="fr-FR" sz="2400" dirty="0"/>
-          </a:p>
-          <a:p>
-            <a:pPr lvl="1"/>
-            <a:r>
-              <a:rPr lang="fr-FR" sz="2000" dirty="0"/>
-              <a:t>Jeux d’entrainement</a:t>
-            </a:r>
-          </a:p>
-          <a:p>
-            <a:pPr lvl="1"/>
-            <a:r>
-              <a:rPr lang="fr-FR" sz="2000" dirty="0"/>
-              <a:t>Calcul du </a:t>
-            </a:r>
-            <a:r>
-              <a:rPr lang="fr-FR" sz="2000" dirty="0" err="1"/>
-              <a:t>Loss</a:t>
-            </a:r>
-            <a:endParaRPr lang="fr-FR" sz="2000" dirty="0"/>
-          </a:p>
-          <a:p>
-            <a:r>
-              <a:rPr lang="fr-FR" sz="2400" dirty="0" err="1"/>
-              <a:t>ValidationSet</a:t>
-            </a:r>
-            <a:endParaRPr lang="fr-FR" sz="2400" dirty="0"/>
-          </a:p>
-          <a:p>
-            <a:pPr lvl="1"/>
-            <a:r>
-              <a:rPr lang="fr-FR" sz="2000" dirty="0"/>
-              <a:t>Jeux pour mesurer la qualité du modèle</a:t>
-            </a:r>
-          </a:p>
-          <a:p>
-            <a:pPr lvl="1"/>
-            <a:r>
-              <a:rPr lang="fr-FR" sz="2000" dirty="0"/>
-              <a:t>Ne doit jamais être vu du modèle</a:t>
-            </a:r>
-          </a:p>
-          <a:p>
-            <a:r>
-              <a:rPr lang="fr-FR" sz="2400" dirty="0" err="1"/>
-              <a:t>TestSet</a:t>
-            </a:r>
-            <a:endParaRPr lang="fr-FR" sz="2400" dirty="0"/>
-          </a:p>
-          <a:p>
-            <a:pPr lvl="1"/>
-            <a:r>
-              <a:rPr lang="fr-FR" sz="2000" dirty="0"/>
-              <a:t>Recette final</a:t>
-            </a:r>
-          </a:p>
-          <a:p>
-            <a:pPr lvl="1"/>
-            <a:r>
-              <a:rPr lang="fr-FR" sz="2000" dirty="0"/>
-              <a:t>Ne doit jamais être vu des développeurs</a:t>
-            </a:r>
-          </a:p>
-        </p:txBody>
-      </p:sp>
-    </p:spTree>
-    <p:extLst>
-      <p:ext uri="{BB962C8B-B14F-4D97-AF65-F5344CB8AC3E}">
-        <p14:creationId xmlns:p14="http://schemas.microsoft.com/office/powerpoint/2010/main" val="1521370590"/>
-      </p:ext>
-    </p:extLst>
-  </p:cSld>
-  <p:clrMapOvr>
-    <a:masterClrMapping/>
-  </p:clrMapOvr>
-</p:sld>
-</file>
-
 <file path=ppt/slides/slide41.xml><?xml version="1.0" encoding="utf-8"?>
 <p:sld xmlns:a="http://schemas.openxmlformats.org/drawingml/2006/main" xmlns:r="http://schemas.openxmlformats.org/officeDocument/2006/relationships" xmlns:p="http://schemas.openxmlformats.org/presentationml/2006/main">
   <p:cSld>
@@ -9953,6 +9917,160 @@
           <a:p>
             <a:r>
               <a:rPr lang="fr-FR" dirty="0"/>
+              <a:t>Vocabulaire</a:t>
+            </a:r>
+          </a:p>
+        </p:txBody>
+      </p:sp>
+      <p:sp>
+        <p:nvSpPr>
+          <p:cNvPr id="3" name="Espace réservé du contenu 2"/>
+          <p:cNvSpPr>
+            <a:spLocks noGrp="1"/>
+          </p:cNvSpPr>
+          <p:nvPr>
+            <p:ph idx="1"/>
+          </p:nvPr>
+        </p:nvSpPr>
+        <p:spPr/>
+        <p:txBody>
+          <a:bodyPr/>
+          <a:lstStyle/>
+          <a:p>
+            <a:r>
+              <a:rPr lang="fr-FR" sz="2400" dirty="0" err="1"/>
+              <a:t>TensorFlow</a:t>
+            </a:r>
+            <a:r>
+              <a:rPr lang="fr-FR" sz="2400" dirty="0"/>
+              <a:t> et </a:t>
+            </a:r>
+            <a:r>
+              <a:rPr lang="fr-FR" sz="2400" dirty="0" err="1"/>
+              <a:t>SKLearn</a:t>
+            </a:r>
+            <a:r>
+              <a:rPr lang="fr-FR" sz="2400" dirty="0"/>
+              <a:t> n’utilisent pas le même vocabulaire</a:t>
+            </a:r>
+          </a:p>
+          <a:p>
+            <a:r>
+              <a:rPr lang="fr-FR" sz="2400" dirty="0" err="1"/>
+              <a:t>TrainingSet</a:t>
+            </a:r>
+            <a:endParaRPr lang="fr-FR" sz="2400" dirty="0"/>
+          </a:p>
+          <a:p>
+            <a:pPr lvl="1"/>
+            <a:r>
+              <a:rPr lang="fr-FR" sz="2000" dirty="0"/>
+              <a:t>Jeux d’entrainement</a:t>
+            </a:r>
+          </a:p>
+          <a:p>
+            <a:pPr lvl="1"/>
+            <a:r>
+              <a:rPr lang="fr-FR" sz="2000" dirty="0"/>
+              <a:t>Calcul du </a:t>
+            </a:r>
+            <a:r>
+              <a:rPr lang="fr-FR" sz="2000" dirty="0" err="1"/>
+              <a:t>Loss</a:t>
+            </a:r>
+            <a:endParaRPr lang="fr-FR" sz="2000" dirty="0"/>
+          </a:p>
+          <a:p>
+            <a:r>
+              <a:rPr lang="fr-FR" sz="2400" dirty="0" err="1"/>
+              <a:t>ValidationSet</a:t>
+            </a:r>
+            <a:endParaRPr lang="fr-FR" sz="2400" dirty="0"/>
+          </a:p>
+          <a:p>
+            <a:pPr lvl="1"/>
+            <a:r>
+              <a:rPr lang="fr-FR" sz="2000" dirty="0"/>
+              <a:t>Jeux pour mesurer la qualité du modèle</a:t>
+            </a:r>
+          </a:p>
+          <a:p>
+            <a:pPr lvl="1"/>
+            <a:r>
+              <a:rPr lang="fr-FR" sz="2000" dirty="0"/>
+              <a:t>Ne doit jamais être vu du modèle</a:t>
+            </a:r>
+          </a:p>
+          <a:p>
+            <a:r>
+              <a:rPr lang="fr-FR" sz="2400" dirty="0" err="1"/>
+              <a:t>TestSet</a:t>
+            </a:r>
+            <a:endParaRPr lang="fr-FR" sz="2400" dirty="0"/>
+          </a:p>
+          <a:p>
+            <a:pPr lvl="1"/>
+            <a:r>
+              <a:rPr lang="fr-FR" sz="2000" dirty="0"/>
+              <a:t>Recette final</a:t>
+            </a:r>
+          </a:p>
+          <a:p>
+            <a:pPr lvl="1"/>
+            <a:r>
+              <a:rPr lang="fr-FR" sz="2000" dirty="0"/>
+              <a:t>Ne doit jamais être vu des développeurs</a:t>
+            </a:r>
+          </a:p>
+        </p:txBody>
+      </p:sp>
+    </p:spTree>
+    <p:extLst>
+      <p:ext uri="{BB962C8B-B14F-4D97-AF65-F5344CB8AC3E}">
+        <p14:creationId xmlns:p14="http://schemas.microsoft.com/office/powerpoint/2010/main" val="1521370590"/>
+      </p:ext>
+    </p:extLst>
+  </p:cSld>
+  <p:clrMapOvr>
+    <a:masterClrMapping/>
+  </p:clrMapOvr>
+</p:sld>
+</file>
+
+<file path=ppt/slides/slide42.xml><?xml version="1.0" encoding="utf-8"?>
+<p:sld xmlns:a="http://schemas.openxmlformats.org/drawingml/2006/main" xmlns:r="http://schemas.openxmlformats.org/officeDocument/2006/relationships" xmlns:p="http://schemas.openxmlformats.org/presentationml/2006/main">
+  <p:cSld>
+    <p:spTree>
+      <p:nvGrpSpPr>
+        <p:cNvPr id="1" name=""/>
+        <p:cNvGrpSpPr/>
+        <p:nvPr/>
+      </p:nvGrpSpPr>
+      <p:grpSpPr>
+        <a:xfrm>
+          <a:off x="0" y="0"/>
+          <a:ext cx="0" cy="0"/>
+          <a:chOff x="0" y="0"/>
+          <a:chExt cx="0" cy="0"/>
+        </a:xfrm>
+      </p:grpSpPr>
+      <p:sp>
+        <p:nvSpPr>
+          <p:cNvPr id="2" name="Titre 1"/>
+          <p:cNvSpPr>
+            <a:spLocks noGrp="1"/>
+          </p:cNvSpPr>
+          <p:nvPr>
+            <p:ph type="title"/>
+          </p:nvPr>
+        </p:nvSpPr>
+        <p:spPr/>
+        <p:txBody>
+          <a:bodyPr/>
+          <a:lstStyle/>
+          <a:p>
+            <a:r>
+              <a:rPr lang="fr-FR" dirty="0"/>
               <a:t>Compréhension des résultats</a:t>
             </a:r>
           </a:p>
@@ -10178,7 +10296,7 @@
 </p:sld>
 </file>
 
-<file path=ppt/slides/slide42.xml><?xml version="1.0" encoding="utf-8"?>
+<file path=ppt/slides/slide43.xml><?xml version="1.0" encoding="utf-8"?>
 <p:sld xmlns:a="http://schemas.openxmlformats.org/drawingml/2006/main" xmlns:r="http://schemas.openxmlformats.org/officeDocument/2006/relationships" xmlns:p="http://schemas.openxmlformats.org/presentationml/2006/main">
   <p:cSld>
     <p:spTree>
@@ -10396,7 +10514,7 @@
 </p:sld>
 </file>
 
-<file path=ppt/slides/slide43.xml><?xml version="1.0" encoding="utf-8"?>
+<file path=ppt/slides/slide44.xml><?xml version="1.0" encoding="utf-8"?>
 <p:sld xmlns:a="http://schemas.openxmlformats.org/drawingml/2006/main" xmlns:r="http://schemas.openxmlformats.org/officeDocument/2006/relationships" xmlns:p="http://schemas.openxmlformats.org/presentationml/2006/main">
   <p:cSld>
     <p:spTree>
